--- a/20251/Phân tích thiết kế HTTT/Hình vẽ/UI.pptx
+++ b/20251/Phân tích thiết kế HTTT/Hình vẽ/UI.pptx
@@ -273,7 +273,7 @@
           <a:p>
             <a:fld id="{318EC273-462E-4ED3-811C-9B6E16FABB30}" type="datetimeFigureOut">
               <a:rPr lang="en-US" smtClean="0"/>
-              <a:t>10/30/2025</a:t>
+              <a:t>11/20/2025</a:t>
             </a:fld>
             <a:endParaRPr lang="en-US"/>
           </a:p>
@@ -471,7 +471,7 @@
           <a:p>
             <a:fld id="{318EC273-462E-4ED3-811C-9B6E16FABB30}" type="datetimeFigureOut">
               <a:rPr lang="en-US" smtClean="0"/>
-              <a:t>10/30/2025</a:t>
+              <a:t>11/20/2025</a:t>
             </a:fld>
             <a:endParaRPr lang="en-US"/>
           </a:p>
@@ -679,7 +679,7 @@
           <a:p>
             <a:fld id="{318EC273-462E-4ED3-811C-9B6E16FABB30}" type="datetimeFigureOut">
               <a:rPr lang="en-US" smtClean="0"/>
-              <a:t>10/30/2025</a:t>
+              <a:t>11/20/2025</a:t>
             </a:fld>
             <a:endParaRPr lang="en-US"/>
           </a:p>
@@ -877,7 +877,7 @@
           <a:p>
             <a:fld id="{318EC273-462E-4ED3-811C-9B6E16FABB30}" type="datetimeFigureOut">
               <a:rPr lang="en-US" smtClean="0"/>
-              <a:t>10/30/2025</a:t>
+              <a:t>11/20/2025</a:t>
             </a:fld>
             <a:endParaRPr lang="en-US"/>
           </a:p>
@@ -1152,7 +1152,7 @@
           <a:p>
             <a:fld id="{318EC273-462E-4ED3-811C-9B6E16FABB30}" type="datetimeFigureOut">
               <a:rPr lang="en-US" smtClean="0"/>
-              <a:t>10/30/2025</a:t>
+              <a:t>11/20/2025</a:t>
             </a:fld>
             <a:endParaRPr lang="en-US"/>
           </a:p>
@@ -1417,7 +1417,7 @@
           <a:p>
             <a:fld id="{318EC273-462E-4ED3-811C-9B6E16FABB30}" type="datetimeFigureOut">
               <a:rPr lang="en-US" smtClean="0"/>
-              <a:t>10/30/2025</a:t>
+              <a:t>11/20/2025</a:t>
             </a:fld>
             <a:endParaRPr lang="en-US"/>
           </a:p>
@@ -1829,7 +1829,7 @@
           <a:p>
             <a:fld id="{318EC273-462E-4ED3-811C-9B6E16FABB30}" type="datetimeFigureOut">
               <a:rPr lang="en-US" smtClean="0"/>
-              <a:t>10/30/2025</a:t>
+              <a:t>11/20/2025</a:t>
             </a:fld>
             <a:endParaRPr lang="en-US"/>
           </a:p>
@@ -1970,7 +1970,7 @@
           <a:p>
             <a:fld id="{318EC273-462E-4ED3-811C-9B6E16FABB30}" type="datetimeFigureOut">
               <a:rPr lang="en-US" smtClean="0"/>
-              <a:t>10/30/2025</a:t>
+              <a:t>11/20/2025</a:t>
             </a:fld>
             <a:endParaRPr lang="en-US"/>
           </a:p>
@@ -2083,7 +2083,7 @@
           <a:p>
             <a:fld id="{318EC273-462E-4ED3-811C-9B6E16FABB30}" type="datetimeFigureOut">
               <a:rPr lang="en-US" smtClean="0"/>
-              <a:t>10/30/2025</a:t>
+              <a:t>11/20/2025</a:t>
             </a:fld>
             <a:endParaRPr lang="en-US"/>
           </a:p>
@@ -2394,7 +2394,7 @@
           <a:p>
             <a:fld id="{318EC273-462E-4ED3-811C-9B6E16FABB30}" type="datetimeFigureOut">
               <a:rPr lang="en-US" smtClean="0"/>
-              <a:t>10/30/2025</a:t>
+              <a:t>11/20/2025</a:t>
             </a:fld>
             <a:endParaRPr lang="en-US"/>
           </a:p>
@@ -2682,7 +2682,7 @@
           <a:p>
             <a:fld id="{318EC273-462E-4ED3-811C-9B6E16FABB30}" type="datetimeFigureOut">
               <a:rPr lang="en-US" smtClean="0"/>
-              <a:t>10/30/2025</a:t>
+              <a:t>11/20/2025</a:t>
             </a:fld>
             <a:endParaRPr lang="en-US"/>
           </a:p>
@@ -2923,7 +2923,7 @@
           <a:p>
             <a:fld id="{318EC273-462E-4ED3-811C-9B6E16FABB30}" type="datetimeFigureOut">
               <a:rPr lang="en-US" smtClean="0"/>
-              <a:t>10/30/2025</a:t>
+              <a:t>11/20/2025</a:t>
             </a:fld>
             <a:endParaRPr lang="en-US"/>
           </a:p>
@@ -5629,7 +5629,7 @@
           <p:nvPr>
             <p:extLst>
               <p:ext uri="{D42A27DB-BD31-4B8C-83A1-F6EECF244321}">
-                <p14:modId xmlns:p14="http://schemas.microsoft.com/office/powerpoint/2010/main" val="826962394"/>
+                <p14:modId xmlns:p14="http://schemas.microsoft.com/office/powerpoint/2010/main" val="208339868"/>
               </p:ext>
             </p:extLst>
           </p:nvPr>
@@ -5859,20 +5859,12 @@
                     <a:p>
                       <a:pPr algn="ctr"/>
                       <a:r>
-                        <a:rPr lang="en-US" dirty="0" err="1"/>
-                        <a:t>Tổng</a:t>
+                        <a:rPr lang="en-US"/>
+                        <a:t>Doanh </a:t>
                       </a:r>
                       <a:r>
                         <a:rPr lang="en-US" dirty="0"/>
-                        <a:t> </a:t>
-                      </a:r>
-                      <a:r>
-                        <a:rPr lang="en-US" dirty="0" err="1"/>
-                        <a:t>doanh</a:t>
-                      </a:r>
-                      <a:r>
-                        <a:rPr lang="en-US" dirty="0"/>
-                        <a:t> chi</a:t>
+                        <a:t>chi</a:t>
                       </a:r>
                     </a:p>
                   </a:txBody>
@@ -7399,7 +7391,7 @@
           <p:nvPr>
             <p:extLst>
               <p:ext uri="{D42A27DB-BD31-4B8C-83A1-F6EECF244321}">
-                <p14:modId xmlns:p14="http://schemas.microsoft.com/office/powerpoint/2010/main" val="3249117060"/>
+                <p14:modId xmlns:p14="http://schemas.microsoft.com/office/powerpoint/2010/main" val="608566918"/>
               </p:ext>
             </p:extLst>
           </p:nvPr>
@@ -7713,9 +7705,18 @@
                     <a:p>
                       <a:pPr algn="ctr"/>
                       <a:r>
+                        <a:rPr lang="en-US" dirty="0" err="1"/>
+                        <a:t>Tổng</a:t>
+                      </a:r>
+                      <a:r>
                         <a:rPr lang="en-US" dirty="0"/>
-                        <a:t>Doanh chi</a:t>
+                        <a:t> </a:t>
                       </a:r>
+                      <a:r>
+                        <a:rPr lang="en-US"/>
+                        <a:t>tiền</a:t>
+                      </a:r>
+                      <a:endParaRPr lang="en-US" dirty="0"/>
                     </a:p>
                   </a:txBody>
                   <a:tcPr>
@@ -15447,7 +15448,7 @@
         </p:nvSpPr>
         <p:spPr>
           <a:xfrm>
-            <a:off x="1483264" y="2406853"/>
+            <a:off x="1483264" y="2661129"/>
             <a:ext cx="1960730" cy="461665"/>
           </a:xfrm>
           <a:prstGeom prst="rect">
@@ -15499,7 +15500,7 @@
         </p:nvSpPr>
         <p:spPr>
           <a:xfrm>
-            <a:off x="3819144" y="2406853"/>
+            <a:off x="3819144" y="2661129"/>
             <a:ext cx="4108704" cy="461665"/>
           </a:xfrm>
           <a:prstGeom prst="rect">
@@ -15543,7 +15544,7 @@
         </p:nvSpPr>
         <p:spPr>
           <a:xfrm>
-            <a:off x="8302752" y="2406853"/>
+            <a:off x="8302752" y="2661129"/>
             <a:ext cx="2299804" cy="461665"/>
           </a:xfrm>
           <a:prstGeom prst="rect">
@@ -15568,10 +15569,10 @@
           <a:bodyPr rtlCol="0" anchor="ctr"/>
           <a:lstStyle/>
           <a:p>
-            <a:pPr algn="r"/>
+            <a:pPr algn="ctr"/>
             <a:r>
               <a:rPr lang="en-US" sz="2000" dirty="0" err="1"/>
-              <a:t>Thêm</a:t>
+              <a:t>Áp</a:t>
             </a:r>
             <a:r>
               <a:rPr lang="en-US" sz="2000" dirty="0"/>
@@ -15579,23 +15580,7 @@
             </a:r>
             <a:r>
               <a:rPr lang="en-US" sz="2000" dirty="0" err="1"/>
-              <a:t>mã</a:t>
-            </a:r>
-            <a:r>
-              <a:rPr lang="en-US" sz="2000" dirty="0"/>
-              <a:t> </a:t>
-            </a:r>
-            <a:r>
-              <a:rPr lang="en-US" sz="2000" dirty="0" err="1"/>
-              <a:t>chiết</a:t>
-            </a:r>
-            <a:r>
-              <a:rPr lang="en-US" sz="2000" dirty="0"/>
-              <a:t> </a:t>
-            </a:r>
-            <a:r>
-              <a:rPr lang="en-US" sz="2000" dirty="0" err="1"/>
-              <a:t>khấu</a:t>
+              <a:t>dụng</a:t>
             </a:r>
             <a:endParaRPr lang="en-US" sz="2000" dirty="0"/>
           </a:p>
@@ -15768,6 +15753,78 @@
             <a:r>
               <a:rPr lang="en-US" sz="2000" dirty="0" err="1"/>
               <a:t>Hủy</a:t>
+            </a:r>
+            <a:endParaRPr lang="en-US" sz="2000" dirty="0"/>
+          </a:p>
+        </p:txBody>
+      </p:sp>
+      <p:sp>
+        <p:nvSpPr>
+          <p:cNvPr id="5" name="Rectangle 4">
+            <a:extLst>
+              <a:ext uri="{FF2B5EF4-FFF2-40B4-BE49-F238E27FC236}">
+                <a16:creationId xmlns:a16="http://schemas.microsoft.com/office/drawing/2014/main" id="{4D19944A-6988-E91D-9778-1D65705C4E46}"/>
+              </a:ext>
+            </a:extLst>
+          </p:cNvPr>
+          <p:cNvSpPr/>
+          <p:nvPr/>
+        </p:nvSpPr>
+        <p:spPr>
+          <a:xfrm>
+            <a:off x="8302752" y="2092671"/>
+            <a:ext cx="2299804" cy="461665"/>
+          </a:xfrm>
+          <a:prstGeom prst="rect">
+            <a:avLst/>
+          </a:prstGeom>
+        </p:spPr>
+        <p:style>
+          <a:lnRef idx="2">
+            <a:schemeClr val="dk1"/>
+          </a:lnRef>
+          <a:fillRef idx="1">
+            <a:schemeClr val="lt1"/>
+          </a:fillRef>
+          <a:effectRef idx="0">
+            <a:schemeClr val="dk1"/>
+          </a:effectRef>
+          <a:fontRef idx="minor">
+            <a:schemeClr val="dk1"/>
+          </a:fontRef>
+        </p:style>
+        <p:txBody>
+          <a:bodyPr rtlCol="0" anchor="ctr"/>
+          <a:lstStyle/>
+          <a:p>
+            <a:pPr algn="ctr"/>
+            <a:r>
+              <a:rPr lang="en-US" sz="2000" dirty="0" err="1"/>
+              <a:t>Thêm</a:t>
+            </a:r>
+            <a:r>
+              <a:rPr lang="en-US" sz="2000" dirty="0"/>
+              <a:t> </a:t>
+            </a:r>
+            <a:r>
+              <a:rPr lang="en-US" sz="2000" dirty="0" err="1"/>
+              <a:t>mã</a:t>
+            </a:r>
+            <a:r>
+              <a:rPr lang="en-US" sz="2000" dirty="0"/>
+              <a:t> </a:t>
+            </a:r>
+            <a:r>
+              <a:rPr lang="en-US" sz="2000" dirty="0" err="1"/>
+              <a:t>chiết</a:t>
+            </a:r>
+            <a:r>
+              <a:rPr lang="en-US" sz="2000" dirty="0"/>
+              <a:t> </a:t>
+            </a:r>
+            <a:r>
+              <a:rPr lang="en-US" sz="2000" dirty="0" err="1"/>
+              <a:t>khấu</a:t>
             </a:r>
             <a:endParaRPr lang="en-US" sz="2000" dirty="0"/>
           </a:p>
